--- a/SustainabilityInNavigationPresentation.pptx
+++ b/SustainabilityInNavigationPresentation.pptx
@@ -10,6 +10,10 @@
     <p:sldId id="258" r:id="rId4"/>
     <p:sldId id="259" r:id="rId5"/>
     <p:sldId id="260" r:id="rId6"/>
+    <p:sldId id="261" r:id="rId7"/>
+    <p:sldId id="262" r:id="rId8"/>
+    <p:sldId id="263" r:id="rId9"/>
+    <p:sldId id="264" r:id="rId10"/>
   </p:sldIdLst>
   <p:sldSz cx="12192000" cy="6858000"/>
   <p:notesSz cx="6858000" cy="9144000"/>
@@ -108,6 +112,11 @@
       </a:defRPr>
     </a:lvl9pPr>
   </p:defaultTextStyle>
+  <p:extLst>
+    <p:ext uri="{EFAFB233-063F-42B5-8137-9DF3F51BA10A}">
+      <p15:sldGuideLst xmlns:p15="http://schemas.microsoft.com/office/powerpoint/2012/main"/>
+    </p:ext>
+  </p:extLst>
 </p:presentation>
 </file>
 
@@ -6250,7 +6259,10 @@
           <a:bodyPr/>
           <a:lstStyle/>
           <a:p>
-            <a:endParaRPr lang="en-GB"/>
+            <a:r>
+              <a:rPr lang="en-GB" dirty="0"/>
+              <a:t>Travel and CO2</a:t>
+            </a:r>
           </a:p>
         </p:txBody>
       </p:sp>
@@ -6330,7 +6342,10 @@
           <a:bodyPr/>
           <a:lstStyle/>
           <a:p>
-            <a:endParaRPr lang="en-GB"/>
+            <a:r>
+              <a:rPr lang="en-GB" dirty="0"/>
+              <a:t>Saving by simply being better</a:t>
+            </a:r>
           </a:p>
         </p:txBody>
       </p:sp>
@@ -6410,7 +6425,10 @@
           <a:bodyPr/>
           <a:lstStyle/>
           <a:p>
-            <a:endParaRPr lang="en-GB"/>
+            <a:r>
+              <a:rPr lang="en-GB" dirty="0"/>
+              <a:t>Personal Model example</a:t>
+            </a:r>
           </a:p>
         </p:txBody>
       </p:sp>
@@ -6443,6 +6461,338 @@
     <p:extLst>
       <p:ext uri="{BB962C8B-B14F-4D97-AF65-F5344CB8AC3E}">
         <p14:creationId xmlns:p14="http://schemas.microsoft.com/office/powerpoint/2010/main" val="2576273109"/>
+      </p:ext>
+    </p:extLst>
+  </p:cSld>
+  <p:clrMapOvr>
+    <a:masterClrMapping/>
+  </p:clrMapOvr>
+</p:sld>
+</file>
+
+<file path=ppt/slides/slide6.xml><?xml version="1.0" encoding="utf-8"?>
+<p:sld xmlns:a="http://schemas.openxmlformats.org/drawingml/2006/main" xmlns:r="http://schemas.openxmlformats.org/officeDocument/2006/relationships" xmlns:p="http://schemas.openxmlformats.org/presentationml/2006/main">
+  <p:cSld>
+    <p:spTree>
+      <p:nvGrpSpPr>
+        <p:cNvPr id="1" name=""/>
+        <p:cNvGrpSpPr/>
+        <p:nvPr/>
+      </p:nvGrpSpPr>
+      <p:grpSpPr>
+        <a:xfrm>
+          <a:off x="0" y="0"/>
+          <a:ext cx="0" cy="0"/>
+          <a:chOff x="0" y="0"/>
+          <a:chExt cx="0" cy="0"/>
+        </a:xfrm>
+      </p:grpSpPr>
+      <p:sp>
+        <p:nvSpPr>
+          <p:cNvPr id="2" name="Title 1">
+            <a:extLst>
+              <a:ext uri="{FF2B5EF4-FFF2-40B4-BE49-F238E27FC236}">
+                <a16:creationId xmlns:a16="http://schemas.microsoft.com/office/drawing/2014/main" id="{FBA63C37-7646-00C3-B6AF-5F46C8625D43}"/>
+              </a:ext>
+            </a:extLst>
+          </p:cNvPr>
+          <p:cNvSpPr>
+            <a:spLocks noGrp="1"/>
+          </p:cNvSpPr>
+          <p:nvPr>
+            <p:ph type="title"/>
+          </p:nvPr>
+        </p:nvSpPr>
+        <p:spPr/>
+        <p:txBody>
+          <a:bodyPr/>
+          <a:lstStyle/>
+          <a:p>
+            <a:r>
+              <a:rPr lang="en-GB" dirty="0"/>
+              <a:t>Model profiling and evaluation</a:t>
+            </a:r>
+          </a:p>
+        </p:txBody>
+      </p:sp>
+      <p:sp>
+        <p:nvSpPr>
+          <p:cNvPr id="3" name="Content Placeholder 2">
+            <a:extLst>
+              <a:ext uri="{FF2B5EF4-FFF2-40B4-BE49-F238E27FC236}">
+                <a16:creationId xmlns:a16="http://schemas.microsoft.com/office/drawing/2014/main" id="{E30785CE-215A-D261-14F6-682F70CF5129}"/>
+              </a:ext>
+            </a:extLst>
+          </p:cNvPr>
+          <p:cNvSpPr>
+            <a:spLocks noGrp="1"/>
+          </p:cNvSpPr>
+          <p:nvPr>
+            <p:ph idx="1"/>
+          </p:nvPr>
+        </p:nvSpPr>
+        <p:spPr/>
+        <p:txBody>
+          <a:bodyPr/>
+          <a:lstStyle/>
+          <a:p>
+            <a:endParaRPr lang="en-GB"/>
+          </a:p>
+        </p:txBody>
+      </p:sp>
+    </p:spTree>
+    <p:extLst>
+      <p:ext uri="{BB962C8B-B14F-4D97-AF65-F5344CB8AC3E}">
+        <p14:creationId xmlns:p14="http://schemas.microsoft.com/office/powerpoint/2010/main" val="2859751754"/>
+      </p:ext>
+    </p:extLst>
+  </p:cSld>
+  <p:clrMapOvr>
+    <a:masterClrMapping/>
+  </p:clrMapOvr>
+</p:sld>
+</file>
+
+<file path=ppt/slides/slide7.xml><?xml version="1.0" encoding="utf-8"?>
+<p:sld xmlns:a="http://schemas.openxmlformats.org/drawingml/2006/main" xmlns:r="http://schemas.openxmlformats.org/officeDocument/2006/relationships" xmlns:p="http://schemas.openxmlformats.org/presentationml/2006/main">
+  <p:cSld>
+    <p:spTree>
+      <p:nvGrpSpPr>
+        <p:cNvPr id="1" name=""/>
+        <p:cNvGrpSpPr/>
+        <p:nvPr/>
+      </p:nvGrpSpPr>
+      <p:grpSpPr>
+        <a:xfrm>
+          <a:off x="0" y="0"/>
+          <a:ext cx="0" cy="0"/>
+          <a:chOff x="0" y="0"/>
+          <a:chExt cx="0" cy="0"/>
+        </a:xfrm>
+      </p:grpSpPr>
+      <p:sp>
+        <p:nvSpPr>
+          <p:cNvPr id="2" name="Title 1">
+            <a:extLst>
+              <a:ext uri="{FF2B5EF4-FFF2-40B4-BE49-F238E27FC236}">
+                <a16:creationId xmlns:a16="http://schemas.microsoft.com/office/drawing/2014/main" id="{3964AFC9-1BF4-8D4B-BA3A-AF3A57D0F47F}"/>
+              </a:ext>
+            </a:extLst>
+          </p:cNvPr>
+          <p:cNvSpPr>
+            <a:spLocks noGrp="1"/>
+          </p:cNvSpPr>
+          <p:nvPr>
+            <p:ph type="title"/>
+          </p:nvPr>
+        </p:nvSpPr>
+        <p:spPr/>
+        <p:txBody>
+          <a:bodyPr/>
+          <a:lstStyle/>
+          <a:p>
+            <a:r>
+              <a:rPr lang="en-GB" dirty="0"/>
+              <a:t>Other prominent examples </a:t>
+            </a:r>
+          </a:p>
+        </p:txBody>
+      </p:sp>
+      <p:sp>
+        <p:nvSpPr>
+          <p:cNvPr id="3" name="Content Placeholder 2">
+            <a:extLst>
+              <a:ext uri="{FF2B5EF4-FFF2-40B4-BE49-F238E27FC236}">
+                <a16:creationId xmlns:a16="http://schemas.microsoft.com/office/drawing/2014/main" id="{10B95B84-320F-D2D5-B7A1-033C104C4392}"/>
+              </a:ext>
+            </a:extLst>
+          </p:cNvPr>
+          <p:cNvSpPr>
+            <a:spLocks noGrp="1"/>
+          </p:cNvSpPr>
+          <p:nvPr>
+            <p:ph idx="1"/>
+          </p:nvPr>
+        </p:nvSpPr>
+        <p:spPr/>
+        <p:txBody>
+          <a:bodyPr/>
+          <a:lstStyle/>
+          <a:p>
+            <a:endParaRPr lang="en-GB"/>
+          </a:p>
+        </p:txBody>
+      </p:sp>
+    </p:spTree>
+    <p:extLst>
+      <p:ext uri="{BB962C8B-B14F-4D97-AF65-F5344CB8AC3E}">
+        <p14:creationId xmlns:p14="http://schemas.microsoft.com/office/powerpoint/2010/main" val="1856179966"/>
+      </p:ext>
+    </p:extLst>
+  </p:cSld>
+  <p:clrMapOvr>
+    <a:masterClrMapping/>
+  </p:clrMapOvr>
+</p:sld>
+</file>
+
+<file path=ppt/slides/slide8.xml><?xml version="1.0" encoding="utf-8"?>
+<p:sld xmlns:a="http://schemas.openxmlformats.org/drawingml/2006/main" xmlns:r="http://schemas.openxmlformats.org/officeDocument/2006/relationships" xmlns:p="http://schemas.openxmlformats.org/presentationml/2006/main">
+  <p:cSld>
+    <p:spTree>
+      <p:nvGrpSpPr>
+        <p:cNvPr id="1" name=""/>
+        <p:cNvGrpSpPr/>
+        <p:nvPr/>
+      </p:nvGrpSpPr>
+      <p:grpSpPr>
+        <a:xfrm>
+          <a:off x="0" y="0"/>
+          <a:ext cx="0" cy="0"/>
+          <a:chOff x="0" y="0"/>
+          <a:chExt cx="0" cy="0"/>
+        </a:xfrm>
+      </p:grpSpPr>
+      <p:sp>
+        <p:nvSpPr>
+          <p:cNvPr id="2" name="Title 1">
+            <a:extLst>
+              <a:ext uri="{FF2B5EF4-FFF2-40B4-BE49-F238E27FC236}">
+                <a16:creationId xmlns:a16="http://schemas.microsoft.com/office/drawing/2014/main" id="{4E116163-C665-E31F-CC36-B319190796E1}"/>
+              </a:ext>
+            </a:extLst>
+          </p:cNvPr>
+          <p:cNvSpPr>
+            <a:spLocks noGrp="1"/>
+          </p:cNvSpPr>
+          <p:nvPr>
+            <p:ph type="title"/>
+          </p:nvPr>
+        </p:nvSpPr>
+        <p:spPr/>
+        <p:txBody>
+          <a:bodyPr/>
+          <a:lstStyle/>
+          <a:p>
+            <a:r>
+              <a:rPr lang="en-GB" dirty="0"/>
+              <a:t>Conclusion</a:t>
+            </a:r>
+          </a:p>
+        </p:txBody>
+      </p:sp>
+      <p:sp>
+        <p:nvSpPr>
+          <p:cNvPr id="3" name="Content Placeholder 2">
+            <a:extLst>
+              <a:ext uri="{FF2B5EF4-FFF2-40B4-BE49-F238E27FC236}">
+                <a16:creationId xmlns:a16="http://schemas.microsoft.com/office/drawing/2014/main" id="{5CE6A558-C01F-21A7-CE42-5A50BF548818}"/>
+              </a:ext>
+            </a:extLst>
+          </p:cNvPr>
+          <p:cNvSpPr>
+            <a:spLocks noGrp="1"/>
+          </p:cNvSpPr>
+          <p:nvPr>
+            <p:ph idx="1"/>
+          </p:nvPr>
+        </p:nvSpPr>
+        <p:spPr/>
+        <p:txBody>
+          <a:bodyPr/>
+          <a:lstStyle/>
+          <a:p>
+            <a:endParaRPr lang="en-GB"/>
+          </a:p>
+        </p:txBody>
+      </p:sp>
+    </p:spTree>
+    <p:extLst>
+      <p:ext uri="{BB962C8B-B14F-4D97-AF65-F5344CB8AC3E}">
+        <p14:creationId xmlns:p14="http://schemas.microsoft.com/office/powerpoint/2010/main" val="187478960"/>
+      </p:ext>
+    </p:extLst>
+  </p:cSld>
+  <p:clrMapOvr>
+    <a:masterClrMapping/>
+  </p:clrMapOvr>
+</p:sld>
+</file>
+
+<file path=ppt/slides/slide9.xml><?xml version="1.0" encoding="utf-8"?>
+<p:sld xmlns:a="http://schemas.openxmlformats.org/drawingml/2006/main" xmlns:r="http://schemas.openxmlformats.org/officeDocument/2006/relationships" xmlns:p="http://schemas.openxmlformats.org/presentationml/2006/main">
+  <p:cSld>
+    <p:spTree>
+      <p:nvGrpSpPr>
+        <p:cNvPr id="1" name=""/>
+        <p:cNvGrpSpPr/>
+        <p:nvPr/>
+      </p:nvGrpSpPr>
+      <p:grpSpPr>
+        <a:xfrm>
+          <a:off x="0" y="0"/>
+          <a:ext cx="0" cy="0"/>
+          <a:chOff x="0" y="0"/>
+          <a:chExt cx="0" cy="0"/>
+        </a:xfrm>
+      </p:grpSpPr>
+      <p:sp>
+        <p:nvSpPr>
+          <p:cNvPr id="2" name="Title 1">
+            <a:extLst>
+              <a:ext uri="{FF2B5EF4-FFF2-40B4-BE49-F238E27FC236}">
+                <a16:creationId xmlns:a16="http://schemas.microsoft.com/office/drawing/2014/main" id="{B4EEE2CB-BEE1-C5CE-5248-4A4511697798}"/>
+              </a:ext>
+            </a:extLst>
+          </p:cNvPr>
+          <p:cNvSpPr>
+            <a:spLocks noGrp="1"/>
+          </p:cNvSpPr>
+          <p:nvPr>
+            <p:ph type="title"/>
+          </p:nvPr>
+        </p:nvSpPr>
+        <p:spPr/>
+        <p:txBody>
+          <a:bodyPr/>
+          <a:lstStyle/>
+          <a:p>
+            <a:r>
+              <a:rPr lang="en-GB" dirty="0"/>
+              <a:t>Thanks for listening</a:t>
+            </a:r>
+          </a:p>
+        </p:txBody>
+      </p:sp>
+      <p:sp>
+        <p:nvSpPr>
+          <p:cNvPr id="3" name="Content Placeholder 2">
+            <a:extLst>
+              <a:ext uri="{FF2B5EF4-FFF2-40B4-BE49-F238E27FC236}">
+                <a16:creationId xmlns:a16="http://schemas.microsoft.com/office/drawing/2014/main" id="{F88A1D8F-B89C-CBC3-4733-438A9124FC3E}"/>
+              </a:ext>
+            </a:extLst>
+          </p:cNvPr>
+          <p:cNvSpPr>
+            <a:spLocks noGrp="1"/>
+          </p:cNvSpPr>
+          <p:nvPr>
+            <p:ph idx="1"/>
+          </p:nvPr>
+        </p:nvSpPr>
+        <p:spPr/>
+        <p:txBody>
+          <a:bodyPr/>
+          <a:lstStyle/>
+          <a:p>
+            <a:endParaRPr lang="en-GB"/>
+          </a:p>
+        </p:txBody>
+      </p:sp>
+    </p:spTree>
+    <p:extLst>
+      <p:ext uri="{BB962C8B-B14F-4D97-AF65-F5344CB8AC3E}">
+        <p14:creationId xmlns:p14="http://schemas.microsoft.com/office/powerpoint/2010/main" val="1335056584"/>
       </p:ext>
     </p:extLst>
   </p:cSld>

--- a/SustainabilityInNavigationPresentation.pptx
+++ b/SustainabilityInNavigationPresentation.pptx
@@ -5973,13 +5973,8 @@
           <a:p>
             <a:r>
               <a:rPr lang="en-GB" dirty="0"/>
-              <a:t>How our daily travels can be optimised for Carbon </a:t>
-            </a:r>
-            <a:r>
-              <a:rPr lang="en-GB" dirty="0" err="1"/>
-              <a:t>emmisions</a:t>
-            </a:r>
-            <a:endParaRPr lang="en-GB" dirty="0"/>
+              <a:t>How our daily travels can be optimised for Carbon emissions</a:t>
+            </a:r>
           </a:p>
         </p:txBody>
       </p:sp>
@@ -6204,10 +6199,77 @@
             <a:pPr marL="0" indent="0">
               <a:buNone/>
             </a:pPr>
-            <a:endParaRPr lang="en-GB" dirty="0"/>
-          </a:p>
-        </p:txBody>
-      </p:sp>
+            <a:r>
+              <a:rPr lang="en-GB" sz="2000" dirty="0"/>
+              <a:t>Modern systems that rely on navigational software but not limited to:</a:t>
+            </a:r>
+          </a:p>
+          <a:p>
+            <a:r>
+              <a:rPr lang="en-GB" sz="2000" dirty="0"/>
+              <a:t>Shipping (and delivery) Industry</a:t>
+            </a:r>
+          </a:p>
+          <a:p>
+            <a:pPr lvl="1"/>
+            <a:r>
+              <a:rPr lang="en-GB" sz="1800" dirty="0"/>
+              <a:t>Example: Weather routing</a:t>
+            </a:r>
+          </a:p>
+          <a:p>
+            <a:r>
+              <a:rPr lang="en-GB" sz="2000" dirty="0"/>
+              <a:t>Traffic management</a:t>
+            </a:r>
+          </a:p>
+          <a:p>
+            <a:r>
+              <a:rPr lang="en-GB" sz="2000" dirty="0"/>
+              <a:t>Day to day travel</a:t>
+            </a:r>
+          </a:p>
+          <a:p>
+            <a:r>
+              <a:rPr lang="en-GB" sz="2000" dirty="0"/>
+              <a:t>Emergency services</a:t>
+            </a:r>
+          </a:p>
+          <a:p>
+            <a:endParaRPr lang="en-GB" sz="2000" dirty="0"/>
+          </a:p>
+        </p:txBody>
+      </p:sp>
+      <p:pic>
+        <p:nvPicPr>
+          <p:cNvPr id="5" name="Picture 4">
+            <a:extLst>
+              <a:ext uri="{FF2B5EF4-FFF2-40B4-BE49-F238E27FC236}">
+                <a16:creationId xmlns:a16="http://schemas.microsoft.com/office/drawing/2014/main" id="{F07903F5-E26C-14CC-CF08-7A2CF89BF9DF}"/>
+              </a:ext>
+            </a:extLst>
+          </p:cNvPr>
+          <p:cNvPicPr>
+            <a:picLocks noChangeAspect="1"/>
+          </p:cNvPicPr>
+          <p:nvPr/>
+        </p:nvPicPr>
+        <p:blipFill>
+          <a:blip r:embed="rId2"/>
+          <a:stretch>
+            <a:fillRect/>
+          </a:stretch>
+        </p:blipFill>
+        <p:spPr>
+          <a:xfrm>
+            <a:off x="4407066" y="3429000"/>
+            <a:ext cx="6725073" cy="2648702"/>
+          </a:xfrm>
+          <a:prstGeom prst="rect">
+            <a:avLst/>
+          </a:prstGeom>
+        </p:spPr>
+      </p:pic>
     </p:spTree>
     <p:extLst>
       <p:ext uri="{BB962C8B-B14F-4D97-AF65-F5344CB8AC3E}">
@@ -6224,6 +6286,14 @@
 <file path=ppt/slides/slide3.xml><?xml version="1.0" encoding="utf-8"?>
 <p:sld xmlns:a="http://schemas.openxmlformats.org/drawingml/2006/main" xmlns:r="http://schemas.openxmlformats.org/officeDocument/2006/relationships" xmlns:p="http://schemas.openxmlformats.org/presentationml/2006/main">
   <p:cSld>
+    <p:bg>
+      <p:bgPr>
+        <a:solidFill>
+          <a:schemeClr val="bg1"/>
+        </a:solidFill>
+        <a:effectLst/>
+      </p:bgPr>
+    </p:bg>
     <p:spTree>
       <p:nvGrpSpPr>
         <p:cNvPr id="1" name=""/>
@@ -6238,6 +6308,190 @@
           <a:chExt cx="0" cy="0"/>
         </a:xfrm>
       </p:grpSpPr>
+      <p:sp useBgFill="1">
+        <p:nvSpPr>
+          <p:cNvPr id="9" name="Rectangle 8">
+            <a:extLst>
+              <a:ext uri="{FF2B5EF4-FFF2-40B4-BE49-F238E27FC236}">
+                <a16:creationId xmlns:a16="http://schemas.microsoft.com/office/drawing/2014/main" id="{9F4444CE-BC8D-4D61-B303-4C05614E62AB}"/>
+              </a:ext>
+              <a:ext uri="{C183D7F6-B498-43B3-948B-1728B52AA6E4}">
+                <adec:decorative xmlns:adec="http://schemas.microsoft.com/office/drawing/2017/decorative" val="1"/>
+              </a:ext>
+            </a:extLst>
+          </p:cNvPr>
+          <p:cNvSpPr>
+            <a:spLocks noGrp="1" noRot="1" noChangeAspect="1" noMove="1" noResize="1" noEditPoints="1" noAdjustHandles="1" noChangeArrowheads="1" noChangeShapeType="1" noTextEdit="1"/>
+          </p:cNvSpPr>
+          <p:nvPr>
+            <p:extLst>
+              <p:ext uri="{386F3935-93C4-4BCD-93E2-E3B085C9AB24}">
+                <p16:designElem xmlns:p16="http://schemas.microsoft.com/office/powerpoint/2015/main" val="1"/>
+              </p:ext>
+            </p:extLst>
+          </p:nvPr>
+        </p:nvSpPr>
+        <p:spPr>
+          <a:xfrm>
+            <a:off x="0" y="0"/>
+            <a:ext cx="12192000" cy="6858000"/>
+          </a:xfrm>
+          <a:prstGeom prst="rect">
+            <a:avLst/>
+          </a:prstGeom>
+          <a:ln>
+            <a:noFill/>
+          </a:ln>
+        </p:spPr>
+        <p:style>
+          <a:lnRef idx="2">
+            <a:schemeClr val="accent1">
+              <a:shade val="50000"/>
+            </a:schemeClr>
+          </a:lnRef>
+          <a:fillRef idx="1">
+            <a:schemeClr val="accent1"/>
+          </a:fillRef>
+          <a:effectRef idx="0">
+            <a:schemeClr val="accent1"/>
+          </a:effectRef>
+          <a:fontRef idx="minor">
+            <a:schemeClr val="lt1"/>
+          </a:fontRef>
+        </p:style>
+        <p:txBody>
+          <a:bodyPr rtlCol="0" anchor="ctr"/>
+          <a:lstStyle/>
+          <a:p>
+            <a:pPr algn="ctr"/>
+            <a:endParaRPr lang="en-US"/>
+          </a:p>
+        </p:txBody>
+      </p:sp>
+      <p:sp>
+        <p:nvSpPr>
+          <p:cNvPr id="11" name="Rectangle 10">
+            <a:extLst>
+              <a:ext uri="{FF2B5EF4-FFF2-40B4-BE49-F238E27FC236}">
+                <a16:creationId xmlns:a16="http://schemas.microsoft.com/office/drawing/2014/main" id="{62423CA5-E2E1-4789-B759-9906C1C94063}"/>
+              </a:ext>
+              <a:ext uri="{C183D7F6-B498-43B3-948B-1728B52AA6E4}">
+                <adec:decorative xmlns:adec="http://schemas.microsoft.com/office/drawing/2017/decorative" val="1"/>
+              </a:ext>
+            </a:extLst>
+          </p:cNvPr>
+          <p:cNvSpPr>
+            <a:spLocks noGrp="1" noRot="1" noChangeAspect="1" noMove="1" noResize="1" noEditPoints="1" noAdjustHandles="1" noChangeArrowheads="1" noChangeShapeType="1" noTextEdit="1"/>
+          </p:cNvSpPr>
+          <p:nvPr>
+            <p:extLst>
+              <p:ext uri="{386F3935-93C4-4BCD-93E2-E3B085C9AB24}">
+                <p16:designElem xmlns:p16="http://schemas.microsoft.com/office/powerpoint/2015/main" val="1"/>
+              </p:ext>
+            </p:extLst>
+          </p:nvPr>
+        </p:nvSpPr>
+        <p:spPr>
+          <a:xfrm>
+            <a:off x="0" y="-3"/>
+            <a:ext cx="4660126" cy="6858000"/>
+          </a:xfrm>
+          <a:prstGeom prst="rect">
+            <a:avLst/>
+          </a:prstGeom>
+          <a:solidFill>
+            <a:schemeClr val="tx2"/>
+          </a:solidFill>
+          <a:ln>
+            <a:noFill/>
+          </a:ln>
+          <a:effectLst/>
+        </p:spPr>
+        <p:style>
+          <a:lnRef idx="1">
+            <a:schemeClr val="accent1"/>
+          </a:lnRef>
+          <a:fillRef idx="3">
+            <a:schemeClr val="accent1"/>
+          </a:fillRef>
+          <a:effectRef idx="2">
+            <a:schemeClr val="accent1"/>
+          </a:effectRef>
+          <a:fontRef idx="minor">
+            <a:schemeClr val="lt1"/>
+          </a:fontRef>
+        </p:style>
+        <p:txBody>
+          <a:bodyPr/>
+          <a:lstStyle/>
+          <a:p>
+            <a:endParaRPr lang="en-US"/>
+          </a:p>
+        </p:txBody>
+      </p:sp>
+      <p:sp>
+        <p:nvSpPr>
+          <p:cNvPr id="13" name="Isosceles Triangle 12">
+            <a:extLst>
+              <a:ext uri="{FF2B5EF4-FFF2-40B4-BE49-F238E27FC236}">
+                <a16:creationId xmlns:a16="http://schemas.microsoft.com/office/drawing/2014/main" id="{73772B81-181F-48B7-8826-4D9686D15DF5}"/>
+              </a:ext>
+              <a:ext uri="{C183D7F6-B498-43B3-948B-1728B52AA6E4}">
+                <adec:decorative xmlns:adec="http://schemas.microsoft.com/office/drawing/2017/decorative" val="1"/>
+              </a:ext>
+            </a:extLst>
+          </p:cNvPr>
+          <p:cNvSpPr>
+            <a:spLocks noGrp="1" noRot="1" noChangeAspect="1" noMove="1" noResize="1" noEditPoints="1" noAdjustHandles="1" noChangeArrowheads="1" noChangeShapeType="1" noTextEdit="1"/>
+          </p:cNvSpPr>
+          <p:nvPr>
+            <p:extLst>
+              <p:ext uri="{386F3935-93C4-4BCD-93E2-E3B085C9AB24}">
+                <p16:designElem xmlns:p16="http://schemas.microsoft.com/office/powerpoint/2015/main" val="1"/>
+              </p:ext>
+            </p:extLst>
+          </p:nvPr>
+        </p:nvSpPr>
+        <p:spPr>
+          <a:xfrm rot="10800000">
+            <a:off x="4660127" y="-3"/>
+            <a:ext cx="1056745" cy="6858001"/>
+          </a:xfrm>
+          <a:prstGeom prst="triangle">
+            <a:avLst>
+              <a:gd name="adj" fmla="val 100000"/>
+            </a:avLst>
+          </a:prstGeom>
+          <a:solidFill>
+            <a:schemeClr val="tx2"/>
+          </a:solidFill>
+          <a:ln>
+            <a:noFill/>
+          </a:ln>
+          <a:effectLst/>
+        </p:spPr>
+        <p:style>
+          <a:lnRef idx="1">
+            <a:schemeClr val="accent1"/>
+          </a:lnRef>
+          <a:fillRef idx="3">
+            <a:schemeClr val="accent1"/>
+          </a:fillRef>
+          <a:effectRef idx="2">
+            <a:schemeClr val="accent1"/>
+          </a:effectRef>
+          <a:fontRef idx="minor">
+            <a:schemeClr val="lt1"/>
+          </a:fontRef>
+        </p:style>
+        <p:txBody>
+          <a:bodyPr/>
+          <a:lstStyle/>
+          <a:p>
+            <a:endParaRPr lang="en-US" dirty="0"/>
+          </a:p>
+        </p:txBody>
+      </p:sp>
       <p:sp>
         <p:nvSpPr>
           <p:cNvPr id="2" name="Title 1">
@@ -6254,13 +6508,24 @@
             <p:ph type="title"/>
           </p:nvPr>
         </p:nvSpPr>
-        <p:spPr/>
-        <p:txBody>
-          <a:bodyPr/>
-          <a:lstStyle/>
-          <a:p>
-            <a:r>
-              <a:rPr lang="en-GB" dirty="0"/>
+        <p:spPr>
+          <a:xfrm>
+            <a:off x="673754" y="643467"/>
+            <a:ext cx="4203045" cy="1375608"/>
+          </a:xfrm>
+        </p:spPr>
+        <p:txBody>
+          <a:bodyPr anchor="ctr">
+            <a:normAutofit/>
+          </a:bodyPr>
+          <a:lstStyle/>
+          <a:p>
+            <a:r>
+              <a:rPr lang="en-GB">
+                <a:solidFill>
+                  <a:schemeClr val="bg1"/>
+                </a:solidFill>
+              </a:rPr>
               <a:t>Travel and CO2</a:t>
             </a:r>
           </a:p>
@@ -6282,15 +6547,180 @@
             <p:ph idx="1"/>
           </p:nvPr>
         </p:nvSpPr>
-        <p:spPr/>
+        <p:spPr>
+          <a:xfrm>
+            <a:off x="673754" y="2160590"/>
+            <a:ext cx="3973943" cy="3440110"/>
+          </a:xfrm>
+        </p:spPr>
+        <p:txBody>
+          <a:bodyPr>
+            <a:normAutofit/>
+          </a:bodyPr>
+          <a:lstStyle/>
+          <a:p>
+            <a:pPr marL="0" indent="0">
+              <a:buNone/>
+            </a:pPr>
+            <a:r>
+              <a:rPr lang="en-GB" dirty="0">
+                <a:solidFill>
+                  <a:schemeClr val="bg1"/>
+                </a:solidFill>
+              </a:rPr>
+              <a:t>Travel contributes to about 22% of global energy related CO2 emissions.</a:t>
+            </a:r>
+          </a:p>
+          <a:p>
+            <a:pPr marL="0" indent="0">
+              <a:buNone/>
+            </a:pPr>
+            <a:endParaRPr lang="en-GB" dirty="0">
+              <a:solidFill>
+                <a:schemeClr val="bg1"/>
+              </a:solidFill>
+            </a:endParaRPr>
+          </a:p>
+          <a:p>
+            <a:pPr marL="0" indent="0">
+              <a:buNone/>
+            </a:pPr>
+            <a:r>
+              <a:rPr lang="en-GB" dirty="0">
+                <a:solidFill>
+                  <a:schemeClr val="bg1"/>
+                </a:solidFill>
+              </a:rPr>
+              <a:t>Roughly 75% of these is from road related transportation, 89% in the UK </a:t>
+            </a:r>
+            <a:r>
+              <a:rPr lang="en-GB" dirty="0">
+                <a:solidFill>
+                  <a:schemeClr val="bg1"/>
+                </a:solidFill>
+                <a:hlinkClick r:id="rId2"/>
+              </a:rPr>
+              <a:t>[Gov.UK reference]</a:t>
+            </a:r>
+            <a:r>
+              <a:rPr lang="en-GB" dirty="0">
+                <a:solidFill>
+                  <a:schemeClr val="bg1"/>
+                </a:solidFill>
+              </a:rPr>
+              <a:t>. </a:t>
+            </a:r>
+          </a:p>
+          <a:p>
+            <a:pPr marL="0" indent="0">
+              <a:buNone/>
+            </a:pPr>
+            <a:r>
+              <a:rPr lang="en-GB" dirty="0">
+                <a:solidFill>
+                  <a:schemeClr val="bg1"/>
+                </a:solidFill>
+              </a:rPr>
+              <a:t>Transport related CO2 output can be significantly reduced if road-based travel is optimised.</a:t>
+            </a:r>
+          </a:p>
+        </p:txBody>
+      </p:sp>
+      <p:sp>
+        <p:nvSpPr>
+          <p:cNvPr id="15" name="Isosceles Triangle 14">
+            <a:extLst>
+              <a:ext uri="{FF2B5EF4-FFF2-40B4-BE49-F238E27FC236}">
+                <a16:creationId xmlns:a16="http://schemas.microsoft.com/office/drawing/2014/main" id="{B2205F6E-03C6-4E92-877C-E2482F6599AA}"/>
+              </a:ext>
+              <a:ext uri="{C183D7F6-B498-43B3-948B-1728B52AA6E4}">
+                <adec:decorative xmlns:adec="http://schemas.microsoft.com/office/drawing/2017/decorative" val="1"/>
+              </a:ext>
+            </a:extLst>
+          </p:cNvPr>
+          <p:cNvSpPr>
+            <a:spLocks noGrp="1" noRot="1" noChangeAspect="1" noMove="1" noResize="1" noEditPoints="1" noAdjustHandles="1" noChangeArrowheads="1" noChangeShapeType="1" noTextEdit="1"/>
+          </p:cNvSpPr>
+          <p:nvPr>
+            <p:extLst>
+              <p:ext uri="{386F3935-93C4-4BCD-93E2-E3B085C9AB24}">
+                <p16:designElem xmlns:p16="http://schemas.microsoft.com/office/powerpoint/2015/main" val="1"/>
+              </p:ext>
+            </p:extLst>
+          </p:nvPr>
+        </p:nvSpPr>
+        <p:spPr>
+          <a:xfrm flipH="1">
+            <a:off x="11755696" y="4013200"/>
+            <a:ext cx="448733" cy="2844800"/>
+          </a:xfrm>
+          <a:prstGeom prst="triangle">
+            <a:avLst>
+              <a:gd name="adj" fmla="val 0"/>
+            </a:avLst>
+          </a:prstGeom>
+          <a:solidFill>
+            <a:schemeClr val="accent1">
+              <a:alpha val="85000"/>
+            </a:schemeClr>
+          </a:solidFill>
+          <a:ln>
+            <a:noFill/>
+          </a:ln>
+          <a:effectLst/>
+        </p:spPr>
+        <p:style>
+          <a:lnRef idx="1">
+            <a:schemeClr val="accent1"/>
+          </a:lnRef>
+          <a:fillRef idx="3">
+            <a:schemeClr val="accent1"/>
+          </a:fillRef>
+          <a:effectRef idx="2">
+            <a:schemeClr val="accent1"/>
+          </a:effectRef>
+          <a:fontRef idx="minor">
+            <a:schemeClr val="lt1"/>
+          </a:fontRef>
+        </p:style>
         <p:txBody>
           <a:bodyPr/>
           <a:lstStyle/>
           <a:p>
-            <a:endParaRPr lang="en-GB"/>
-          </a:p>
-        </p:txBody>
-      </p:sp>
+            <a:endParaRPr lang="en-US" dirty="0"/>
+          </a:p>
+        </p:txBody>
+      </p:sp>
+      <p:pic>
+        <p:nvPicPr>
+          <p:cNvPr id="5" name="Picture 4">
+            <a:extLst>
+              <a:ext uri="{FF2B5EF4-FFF2-40B4-BE49-F238E27FC236}">
+                <a16:creationId xmlns:a16="http://schemas.microsoft.com/office/drawing/2014/main" id="{D5F54060-3B9D-C7E2-8BCB-4FDC0ACE8297}"/>
+              </a:ext>
+            </a:extLst>
+          </p:cNvPr>
+          <p:cNvPicPr>
+            <a:picLocks noChangeAspect="1"/>
+          </p:cNvPicPr>
+          <p:nvPr/>
+        </p:nvPicPr>
+        <p:blipFill>
+          <a:blip r:embed="rId3"/>
+          <a:stretch>
+            <a:fillRect/>
+          </a:stretch>
+        </p:blipFill>
+        <p:spPr>
+          <a:xfrm>
+            <a:off x="5333880" y="1523685"/>
+            <a:ext cx="6894838" cy="4379809"/>
+          </a:xfrm>
+          <a:prstGeom prst="rect">
+            <a:avLst/>
+          </a:prstGeom>
+        </p:spPr>
+      </p:pic>
     </p:spTree>
     <p:extLst>
       <p:ext uri="{BB962C8B-B14F-4D97-AF65-F5344CB8AC3E}">
@@ -6367,10 +6797,48 @@
         </p:nvSpPr>
         <p:spPr/>
         <p:txBody>
-          <a:bodyPr/>
-          <a:lstStyle/>
-          <a:p>
-            <a:endParaRPr lang="en-GB"/>
+          <a:bodyPr>
+            <a:normAutofit/>
+          </a:bodyPr>
+          <a:lstStyle/>
+          <a:p>
+            <a:pPr marL="0" indent="0">
+              <a:buNone/>
+            </a:pPr>
+            <a:r>
+              <a:rPr lang="en-GB" sz="2000" dirty="0"/>
+              <a:t>A start to this would be an improvement to our driving routes.</a:t>
+            </a:r>
+          </a:p>
+          <a:p>
+            <a:pPr marL="0" indent="0">
+              <a:buNone/>
+            </a:pPr>
+            <a:endParaRPr lang="en-GB" sz="2000" dirty="0"/>
+          </a:p>
+          <a:p>
+            <a:pPr marL="0" indent="0">
+              <a:buNone/>
+            </a:pPr>
+            <a:r>
+              <a:rPr lang="en-GB" sz="2000" dirty="0"/>
+              <a:t>Google maps already saves an estimate of 10% - 30% energy on a trip.</a:t>
+            </a:r>
+          </a:p>
+          <a:p>
+            <a:pPr marL="0" indent="0">
+              <a:buNone/>
+            </a:pPr>
+            <a:endParaRPr lang="en-GB" sz="2000" dirty="0"/>
+          </a:p>
+          <a:p>
+            <a:pPr marL="0" indent="0">
+              <a:buNone/>
+            </a:pPr>
+            <a:r>
+              <a:rPr lang="en-GB" sz="2000" dirty="0"/>
+              <a:t>DO consider the computational cost of such calculations, although it is extremely efficient.</a:t>
+            </a:r>
           </a:p>
         </p:txBody>
       </p:sp>
@@ -6426,21 +6894,52 @@
           <a:lstStyle/>
           <a:p>
             <a:r>
-              <a:rPr lang="en-GB" dirty="0"/>
+              <a:rPr lang="en-GB"/>
               <a:t>Personal Model example</a:t>
             </a:r>
-          </a:p>
-        </p:txBody>
-      </p:sp>
-      <p:sp>
-        <p:nvSpPr>
-          <p:cNvPr id="3" name="Content Placeholder 2">
+            <a:endParaRPr lang="en-GB" dirty="0"/>
+          </a:p>
+        </p:txBody>
+      </p:sp>
+      <p:pic>
+        <p:nvPicPr>
+          <p:cNvPr id="5" name="Picture 4">
             <a:extLst>
               <a:ext uri="{FF2B5EF4-FFF2-40B4-BE49-F238E27FC236}">
-                <a16:creationId xmlns:a16="http://schemas.microsoft.com/office/drawing/2014/main" id="{A3EA55DB-8F22-1C58-F6BC-4C9EFFE62B05}"/>
+                <a16:creationId xmlns:a16="http://schemas.microsoft.com/office/drawing/2014/main" id="{AE3DC9E8-3A6E-0B22-E133-0E95F64B6B31}"/>
               </a:ext>
             </a:extLst>
           </p:cNvPr>
+          <p:cNvPicPr>
+            <a:picLocks noChangeAspect="1"/>
+          </p:cNvPicPr>
+          <p:nvPr/>
+        </p:nvPicPr>
+        <p:blipFill>
+          <a:blip r:embed="rId2"/>
+          <a:stretch>
+            <a:fillRect/>
+          </a:stretch>
+        </p:blipFill>
+        <p:spPr>
+          <a:xfrm>
+            <a:off x="6096000" y="609600"/>
+            <a:ext cx="3458897" cy="5777604"/>
+          </a:xfrm>
+          <a:prstGeom prst="rect">
+            <a:avLst/>
+          </a:prstGeom>
+        </p:spPr>
+      </p:pic>
+      <p:sp>
+        <p:nvSpPr>
+          <p:cNvPr id="9" name="Content Placeholder 2">
+            <a:extLst>
+              <a:ext uri="{FF2B5EF4-FFF2-40B4-BE49-F238E27FC236}">
+                <a16:creationId xmlns:a16="http://schemas.microsoft.com/office/drawing/2014/main" id="{CE7C0042-839C-5DB4-7444-7807E32835AF}"/>
+              </a:ext>
+            </a:extLst>
+          </p:cNvPr>
           <p:cNvSpPr>
             <a:spLocks noGrp="1"/>
           </p:cNvSpPr>
@@ -6448,12 +6947,40 @@
             <p:ph idx="1"/>
           </p:nvPr>
         </p:nvSpPr>
-        <p:spPr/>
-        <p:txBody>
-          <a:bodyPr/>
-          <a:lstStyle/>
-          <a:p>
-            <a:endParaRPr lang="en-GB"/>
+        <p:spPr>
+          <a:xfrm>
+            <a:off x="677334" y="2160589"/>
+            <a:ext cx="4985529" cy="3880773"/>
+          </a:xfrm>
+        </p:spPr>
+        <p:txBody>
+          <a:bodyPr>
+            <a:normAutofit/>
+          </a:bodyPr>
+          <a:lstStyle/>
+          <a:p>
+            <a:pPr marL="0" indent="0">
+              <a:buNone/>
+            </a:pPr>
+            <a:r>
+              <a:rPr lang="en-GB" sz="2000" dirty="0"/>
+              <a:t>The main example is a drive from North to South of Manchester.</a:t>
+            </a:r>
+          </a:p>
+          <a:p>
+            <a:pPr marL="0" indent="0">
+              <a:buNone/>
+            </a:pPr>
+            <a:r>
+              <a:rPr lang="en-GB" sz="2000" dirty="0"/>
+              <a:t>Specifically, from Heaton part to Chorlton water park</a:t>
+            </a:r>
+          </a:p>
+          <a:p>
+            <a:pPr marL="0" indent="0">
+              <a:buNone/>
+            </a:pPr>
+            <a:endParaRPr lang="en-GB" sz="2000" dirty="0"/>
           </a:p>
         </p:txBody>
       </p:sp>
@@ -6515,31 +7042,128 @@
           </a:p>
         </p:txBody>
       </p:sp>
-      <p:sp>
-        <p:nvSpPr>
-          <p:cNvPr id="3" name="Content Placeholder 2">
+      <p:pic>
+        <p:nvPicPr>
+          <p:cNvPr id="4" name="Content Placeholder 3">
             <a:extLst>
               <a:ext uri="{FF2B5EF4-FFF2-40B4-BE49-F238E27FC236}">
-                <a16:creationId xmlns:a16="http://schemas.microsoft.com/office/drawing/2014/main" id="{E30785CE-215A-D261-14F6-682F70CF5129}"/>
+                <a16:creationId xmlns:a16="http://schemas.microsoft.com/office/drawing/2014/main" id="{6B3DE5A7-1D27-4F8A-93B3-91DBBA69F548}"/>
               </a:ext>
             </a:extLst>
           </p:cNvPr>
-          <p:cNvSpPr>
-            <a:spLocks noGrp="1"/>
-          </p:cNvSpPr>
+          <p:cNvPicPr>
+            <a:picLocks noGrp="1" noChangeAspect="1"/>
+          </p:cNvPicPr>
           <p:nvPr>
             <p:ph idx="1"/>
           </p:nvPr>
-        </p:nvSpPr>
-        <p:spPr/>
-        <p:txBody>
-          <a:bodyPr/>
-          <a:lstStyle/>
-          <a:p>
-            <a:endParaRPr lang="en-GB"/>
-          </a:p>
-        </p:txBody>
-      </p:sp>
+        </p:nvPicPr>
+        <p:blipFill>
+          <a:blip r:embed="rId2"/>
+          <a:stretch>
+            <a:fillRect/>
+          </a:stretch>
+        </p:blipFill>
+        <p:spPr>
+          <a:xfrm>
+            <a:off x="4975668" y="3409406"/>
+            <a:ext cx="7059780" cy="2987299"/>
+          </a:xfrm>
+          <a:prstGeom prst="rect">
+            <a:avLst/>
+          </a:prstGeom>
+        </p:spPr>
+      </p:pic>
+      <p:pic>
+        <p:nvPicPr>
+          <p:cNvPr id="6" name="Picture 5">
+            <a:extLst>
+              <a:ext uri="{FF2B5EF4-FFF2-40B4-BE49-F238E27FC236}">
+                <a16:creationId xmlns:a16="http://schemas.microsoft.com/office/drawing/2014/main" id="{3D36937A-89FA-812F-ECDC-BFB36E7C7008}"/>
+              </a:ext>
+            </a:extLst>
+          </p:cNvPr>
+          <p:cNvPicPr>
+            <a:picLocks noChangeAspect="1"/>
+          </p:cNvPicPr>
+          <p:nvPr/>
+        </p:nvPicPr>
+        <p:blipFill>
+          <a:blip r:embed="rId3"/>
+          <a:stretch>
+            <a:fillRect/>
+          </a:stretch>
+        </p:blipFill>
+        <p:spPr>
+          <a:xfrm>
+            <a:off x="8118619" y="1088208"/>
+            <a:ext cx="2724530" cy="2114845"/>
+          </a:xfrm>
+          <a:prstGeom prst="rect">
+            <a:avLst/>
+          </a:prstGeom>
+        </p:spPr>
+      </p:pic>
+      <p:pic>
+        <p:nvPicPr>
+          <p:cNvPr id="8" name="Picture 7">
+            <a:extLst>
+              <a:ext uri="{FF2B5EF4-FFF2-40B4-BE49-F238E27FC236}">
+                <a16:creationId xmlns:a16="http://schemas.microsoft.com/office/drawing/2014/main" id="{A9FD0D12-D8BC-5229-6CBE-86A9CAB6F753}"/>
+              </a:ext>
+            </a:extLst>
+          </p:cNvPr>
+          <p:cNvPicPr>
+            <a:picLocks noChangeAspect="1"/>
+          </p:cNvPicPr>
+          <p:nvPr/>
+        </p:nvPicPr>
+        <p:blipFill>
+          <a:blip r:embed="rId4"/>
+          <a:stretch>
+            <a:fillRect/>
+          </a:stretch>
+        </p:blipFill>
+        <p:spPr>
+          <a:xfrm>
+            <a:off x="2014588" y="1711553"/>
+            <a:ext cx="2172003" cy="1619476"/>
+          </a:xfrm>
+          <a:prstGeom prst="rect">
+            <a:avLst/>
+          </a:prstGeom>
+        </p:spPr>
+      </p:pic>
+      <p:pic>
+        <p:nvPicPr>
+          <p:cNvPr id="10" name="Picture 9">
+            <a:extLst>
+              <a:ext uri="{FF2B5EF4-FFF2-40B4-BE49-F238E27FC236}">
+                <a16:creationId xmlns:a16="http://schemas.microsoft.com/office/drawing/2014/main" id="{CADE10F1-3E6C-FDE0-6E8C-02D1A811D06D}"/>
+              </a:ext>
+            </a:extLst>
+          </p:cNvPr>
+          <p:cNvPicPr>
+            <a:picLocks noChangeAspect="1"/>
+          </p:cNvPicPr>
+          <p:nvPr/>
+        </p:nvPicPr>
+        <p:blipFill>
+          <a:blip r:embed="rId5"/>
+          <a:stretch>
+            <a:fillRect/>
+          </a:stretch>
+        </p:blipFill>
+        <p:spPr>
+          <a:xfrm>
+            <a:off x="1843114" y="3823354"/>
+            <a:ext cx="2343477" cy="1667108"/>
+          </a:xfrm>
+          <a:prstGeom prst="rect">
+            <a:avLst/>
+          </a:prstGeom>
+        </p:spPr>
+      </p:pic>
     </p:spTree>
     <p:extLst>
       <p:ext uri="{BB962C8B-B14F-4D97-AF65-F5344CB8AC3E}">
@@ -6556,6 +7180,14 @@
 <file path=ppt/slides/slide7.xml><?xml version="1.0" encoding="utf-8"?>
 <p:sld xmlns:a="http://schemas.openxmlformats.org/drawingml/2006/main" xmlns:r="http://schemas.openxmlformats.org/officeDocument/2006/relationships" xmlns:p="http://schemas.openxmlformats.org/presentationml/2006/main">
   <p:cSld>
+    <p:bg>
+      <p:bgPr>
+        <a:solidFill>
+          <a:schemeClr val="bg1"/>
+        </a:solidFill>
+        <a:effectLst/>
+      </p:bgPr>
+    </p:bg>
     <p:spTree>
       <p:nvGrpSpPr>
         <p:cNvPr id="1" name=""/>
@@ -6586,9 +7218,16 @@
             <p:ph type="title"/>
           </p:nvPr>
         </p:nvSpPr>
-        <p:spPr/>
-        <p:txBody>
-          <a:bodyPr/>
+        <p:spPr>
+          <a:xfrm>
+            <a:off x="676746" y="609600"/>
+            <a:ext cx="3729076" cy="1320800"/>
+          </a:xfrm>
+        </p:spPr>
+        <p:txBody>
+          <a:bodyPr anchor="ctr">
+            <a:normAutofit/>
+          </a:bodyPr>
           <a:lstStyle/>
           <a:p>
             <a:r>
@@ -6614,15 +7253,67 @@
             <p:ph idx="1"/>
           </p:nvPr>
         </p:nvSpPr>
-        <p:spPr/>
-        <p:txBody>
-          <a:bodyPr/>
-          <a:lstStyle/>
-          <a:p>
-            <a:endParaRPr lang="en-GB"/>
-          </a:p>
-        </p:txBody>
-      </p:sp>
+        <p:spPr>
+          <a:xfrm>
+            <a:off x="685167" y="2160589"/>
+            <a:ext cx="3720916" cy="3560733"/>
+          </a:xfrm>
+        </p:spPr>
+        <p:txBody>
+          <a:bodyPr>
+            <a:normAutofit/>
+          </a:bodyPr>
+          <a:lstStyle/>
+          <a:p>
+            <a:pPr marL="0" indent="0">
+              <a:buNone/>
+            </a:pPr>
+            <a:r>
+              <a:rPr lang="en-GB" dirty="0"/>
+              <a:t>Google maps proposes taking the ring road to reach the destination faster.</a:t>
+            </a:r>
+          </a:p>
+          <a:p>
+            <a:pPr marL="0" indent="0">
+              <a:buNone/>
+            </a:pPr>
+            <a:r>
+              <a:rPr lang="en-GB" dirty="0"/>
+              <a:t>The city route is still available although with a slower max estimated time.</a:t>
+            </a:r>
+          </a:p>
+        </p:txBody>
+      </p:sp>
+      <p:pic>
+        <p:nvPicPr>
+          <p:cNvPr id="5" name="Picture 4" descr="A map with a blue line&#10;&#10;AI-generated content may be incorrect.">
+            <a:extLst>
+              <a:ext uri="{FF2B5EF4-FFF2-40B4-BE49-F238E27FC236}">
+                <a16:creationId xmlns:a16="http://schemas.microsoft.com/office/drawing/2014/main" id="{8A860D91-3F6A-ABF8-9EFF-36F0A0B5FCC9}"/>
+              </a:ext>
+            </a:extLst>
+          </p:cNvPr>
+          <p:cNvPicPr>
+            <a:picLocks noChangeAspect="1"/>
+          </p:cNvPicPr>
+          <p:nvPr/>
+        </p:nvPicPr>
+        <p:blipFill>
+          <a:blip r:embed="rId2"/>
+          <a:stretch>
+            <a:fillRect/>
+          </a:stretch>
+        </p:blipFill>
+        <p:spPr>
+          <a:xfrm>
+            <a:off x="6434708" y="1564887"/>
+            <a:ext cx="4602747" cy="3728225"/>
+          </a:xfrm>
+          <a:prstGeom prst="rect">
+            <a:avLst/>
+          </a:prstGeom>
+        </p:spPr>
+      </p:pic>
     </p:spTree>
     <p:extLst>
       <p:ext uri="{BB962C8B-B14F-4D97-AF65-F5344CB8AC3E}">
@@ -6702,7 +7393,19 @@
           <a:bodyPr/>
           <a:lstStyle/>
           <a:p>
-            <a:endParaRPr lang="en-GB"/>
+            <a:r>
+              <a:rPr lang="en-GB" dirty="0"/>
+              <a:t>If everyone were to use the model you could significantly reduce the CO2 emissions of travel as even a 5% reduction in energy usage will scale to millions of CO2 saved per year</a:t>
+            </a:r>
+          </a:p>
+          <a:p>
+            <a:endParaRPr lang="en-GB" dirty="0"/>
+          </a:p>
+          <a:p>
+            <a:r>
+              <a:rPr lang="en-GB" dirty="0"/>
+              <a:t>However, this model would require to be developed further to include traffic, specific car stats </a:t>
+            </a:r>
           </a:p>
         </p:txBody>
       </p:sp>
@@ -6752,7 +7455,12 @@
             <p:ph type="title"/>
           </p:nvPr>
         </p:nvSpPr>
-        <p:spPr/>
+        <p:spPr>
+          <a:xfrm>
+            <a:off x="2843019" y="2768600"/>
+            <a:ext cx="8596668" cy="1320800"/>
+          </a:xfrm>
+        </p:spPr>
         <p:txBody>
           <a:bodyPr/>
           <a:lstStyle/>
@@ -6761,31 +7469,6 @@
               <a:rPr lang="en-GB" dirty="0"/>
               <a:t>Thanks for listening</a:t>
             </a:r>
-          </a:p>
-        </p:txBody>
-      </p:sp>
-      <p:sp>
-        <p:nvSpPr>
-          <p:cNvPr id="3" name="Content Placeholder 2">
-            <a:extLst>
-              <a:ext uri="{FF2B5EF4-FFF2-40B4-BE49-F238E27FC236}">
-                <a16:creationId xmlns:a16="http://schemas.microsoft.com/office/drawing/2014/main" id="{F88A1D8F-B89C-CBC3-4733-438A9124FC3E}"/>
-              </a:ext>
-            </a:extLst>
-          </p:cNvPr>
-          <p:cNvSpPr>
-            <a:spLocks noGrp="1"/>
-          </p:cNvSpPr>
-          <p:nvPr>
-            <p:ph idx="1"/>
-          </p:nvPr>
-        </p:nvSpPr>
-        <p:spPr/>
-        <p:txBody>
-          <a:bodyPr/>
-          <a:lstStyle/>
-          <a:p>
-            <a:endParaRPr lang="en-GB"/>
           </a:p>
         </p:txBody>
       </p:sp>
